--- a/pastoral-projects/the-planting-project/downloads/The_Planting_Project.pptx
+++ b/pastoral-projects/the-planting-project/downloads/The_Planting_Project.pptx
@@ -11621,7 +11621,7 @@
                 <a:cs typeface="Cambria"/>
                 <a:sym typeface="Cambria"/>
               </a:rPr>
-              <a:t>Great teamwork, real responsibility, and something thoughtful for the people you love. Well done!</a:t>
+              <a:t>Great teamwork, real responsibility, and something thoughtful for the people at home. Well done!</a:t>
             </a:r>
             <a:endParaRPr b="0" i="0" sz="1400" u="none" cap="none" strike="noStrike">
               <a:solidFill>

--- a/pastoral-projects/the-planting-project/downloads/The_Planting_Project.pptx
+++ b/pastoral-projects/the-planting-project/downloads/The_Planting_Project.pptx
@@ -20025,7 +20025,7 @@
         </p:nvGrpSpPr>
         <p:grpSpPr>
           <a:xfrm>
-            <a:off x="6271750" y="2761225"/>
+            <a:off x="6271750" y="2560320"/>
             <a:ext cx="2590800" cy="2234100"/>
             <a:chOff x="281450" y="195250"/>
             <a:chExt cx="2590800" cy="2234100"/>
@@ -20582,7 +20582,7 @@
         </p:nvGrpSpPr>
         <p:grpSpPr>
           <a:xfrm>
-            <a:off x="3276600" y="2761225"/>
+            <a:off x="3276600" y="2560320"/>
             <a:ext cx="2590800" cy="2234100"/>
             <a:chOff x="281450" y="195250"/>
             <a:chExt cx="2590800" cy="2234100"/>
@@ -21139,7 +21139,7 @@
         </p:nvGrpSpPr>
         <p:grpSpPr>
           <a:xfrm>
-            <a:off x="281450" y="2761225"/>
+            <a:off x="281450" y="2560320"/>
             <a:ext cx="2590800" cy="2234100"/>
             <a:chOff x="281450" y="195250"/>
             <a:chExt cx="2590800" cy="2234100"/>
@@ -21696,7 +21696,7 @@
         </p:nvSpPr>
         <p:spPr>
           <a:xfrm>
-            <a:off x="420624" y="4759452"/>
+            <a:off x="420624" y="4841748"/>
             <a:ext cx="2377440" cy="274320"/>
           </a:xfrm>
           <a:prstGeom prst="rect">
@@ -21739,7 +21739,7 @@
         </p:blipFill>
         <p:spPr>
           <a:xfrm>
-            <a:off x="266505" y="4768596"/>
+            <a:off x="266505" y="4850892"/>
             <a:ext cx="116214" cy="134142"/>
           </a:xfrm>
           <a:prstGeom prst="rect">

--- a/pastoral-projects/the-planting-project/downloads/The_Planting_Project.pptx
+++ b/pastoral-projects/the-planting-project/downloads/The_Planting_Project.pptx
@@ -4306,11 +4306,11 @@
               <a:buNone/>
             </a:pPr>
             <a:r>
-              <a:rPr b="1" i="0" lang="en-US" sz="4200" u="none" cap="none" strike="noStrike">
+              <a:rPr b="0" i="0" lang="en-US" sz="4200" u="none" cap="none" strike="noStrike">
                 <a:solidFill>
                   <a:srgbClr val="5E8B6E"/>
                 </a:solidFill>
-                <a:latin typeface="Libre Caslon Display"/>
+                <a:latin typeface="Georgia"/>
                 <a:ea typeface="Cambria"/>
                 <a:cs typeface="Cambria"/>
                 <a:sym typeface="Cambria"/>
@@ -4376,7 +4376,7 @@
                 <a:solidFill>
                   <a:srgbClr val="5C6552"/>
                 </a:solidFill>
-                <a:latin typeface="Karla"/>
+                <a:latin typeface="Calibri"/>
                 <a:ea typeface="Calibri"/>
                 <a:cs typeface="Calibri"/>
                 <a:sym typeface="Calibri"/>
@@ -4388,7 +4388,7 @@
                 <a:solidFill>
                   <a:srgbClr val="5C6552"/>
                 </a:solidFill>
-                <a:latin typeface="Karla"/>
+                <a:latin typeface="Calibri"/>
                 <a:ea typeface="Calibri"/>
                 <a:cs typeface="Calibri"/>
                 <a:sym typeface="Calibri"/>
@@ -4400,7 +4400,7 @@
                 <a:solidFill>
                   <a:srgbClr val="5C6552"/>
                 </a:solidFill>
-                <a:latin typeface="Karla"/>
+                <a:latin typeface="Calibri"/>
                 <a:ea typeface="Calibri"/>
                 <a:cs typeface="Calibri"/>
                 <a:sym typeface="Calibri"/>
@@ -4412,7 +4412,7 @@
                 <a:solidFill>
                   <a:srgbClr val="5C6552"/>
                 </a:solidFill>
-                <a:latin typeface="Karla"/>
+                <a:latin typeface="Calibri"/>
                 <a:ea typeface="Calibri"/>
                 <a:cs typeface="Calibri"/>
                 <a:sym typeface="Calibri"/>
@@ -4424,7 +4424,7 @@
                 <a:solidFill>
                   <a:srgbClr val="5C6552"/>
                 </a:solidFill>
-                <a:latin typeface="Karla"/>
+                <a:latin typeface="Calibri"/>
                 <a:ea typeface="Calibri"/>
                 <a:cs typeface="Calibri"/>
                 <a:sym typeface="Calibri"/>
@@ -4487,7 +4487,7 @@
                 <a:solidFill>
                   <a:srgbClr val="B1C69A"/>
                 </a:solidFill>
-                <a:latin typeface="Karla"/>
+                <a:latin typeface="Calibri"/>
                 <a:ea typeface="Calibri"/>
                 <a:cs typeface="Calibri"/>
                 <a:sym typeface="Calibri"/>
@@ -4550,7 +4550,7 @@
                 <a:solidFill>
                   <a:srgbClr val="899B86"/>
                 </a:solidFill>
-                <a:latin typeface="Karla"/>
+                <a:latin typeface="Calibri"/>
                 <a:ea typeface="Calibri"/>
                 <a:cs typeface="Calibri"/>
                 <a:sym typeface="Calibri"/>
@@ -4597,7 +4597,7 @@
                 <a:solidFill>
                   <a:srgbClr val="8B9179"/>
                 </a:solidFill>
-                <a:latin typeface="Karla"/>
+                <a:latin typeface="Calibri"/>
               </a:rPr>
               <a:t>The Pastoral Guide</a:t>
             </a:r>
@@ -4752,7 +4752,7 @@
                 <a:solidFill>
                   <a:srgbClr val="B1C69A"/>
                 </a:solidFill>
-                <a:latin typeface="Karla"/>
+                <a:latin typeface="Calibri"/>
                 <a:ea typeface="Calibri"/>
                 <a:cs typeface="Calibri"/>
                 <a:sym typeface="Calibri"/>
@@ -4811,11 +4811,11 @@
               <a:buNone/>
             </a:pPr>
             <a:r>
-              <a:rPr b="1" i="0" lang="en-US" sz="3000" u="none" cap="none" strike="noStrike">
+              <a:rPr b="0" i="0" lang="en-US" sz="3000" u="none" cap="none" strike="noStrike">
                 <a:solidFill>
                   <a:srgbClr val="41A45D"/>
                 </a:solidFill>
-                <a:latin typeface="Libre Caslon Display"/>
+                <a:latin typeface="Georgia"/>
                 <a:ea typeface="Cambria"/>
                 <a:cs typeface="Cambria"/>
                 <a:sym typeface="Cambria"/>
@@ -4993,7 +4993,7 @@
                 <a:solidFill>
                   <a:srgbClr val="4F7B4F"/>
                 </a:solidFill>
-                <a:latin typeface="Karla"/>
+                <a:latin typeface="Calibri"/>
                 <a:ea typeface="Calibri"/>
                 <a:cs typeface="Calibri"/>
                 <a:sym typeface="Calibri"/>
@@ -5127,7 +5127,7 @@
                 <a:solidFill>
                   <a:srgbClr val="4F7B4F"/>
                 </a:solidFill>
-                <a:latin typeface="Karla"/>
+                <a:latin typeface="Calibri"/>
                 <a:ea typeface="Calibri"/>
                 <a:cs typeface="Calibri"/>
                 <a:sym typeface="Calibri"/>
@@ -5305,7 +5305,7 @@
                 <a:solidFill>
                   <a:srgbClr val="4F7B4F"/>
                 </a:solidFill>
-                <a:latin typeface="Karla"/>
+                <a:latin typeface="Calibri"/>
                 <a:ea typeface="Calibri"/>
                 <a:cs typeface="Calibri"/>
                 <a:sym typeface="Calibri"/>
@@ -5439,7 +5439,7 @@
                 <a:solidFill>
                   <a:srgbClr val="4F7B4F"/>
                 </a:solidFill>
-                <a:latin typeface="Karla"/>
+                <a:latin typeface="Calibri"/>
                 <a:ea typeface="Calibri"/>
                 <a:cs typeface="Calibri"/>
                 <a:sym typeface="Calibri"/>
@@ -5617,7 +5617,7 @@
                 <a:solidFill>
                   <a:srgbClr val="4F7B4F"/>
                 </a:solidFill>
-                <a:latin typeface="Karla"/>
+                <a:latin typeface="Calibri"/>
                 <a:ea typeface="Calibri"/>
                 <a:cs typeface="Calibri"/>
                 <a:sym typeface="Calibri"/>
@@ -5751,7 +5751,7 @@
                 <a:solidFill>
                   <a:srgbClr val="4F7B4F"/>
                 </a:solidFill>
-                <a:latin typeface="Karla"/>
+                <a:latin typeface="Calibri"/>
                 <a:ea typeface="Calibri"/>
                 <a:cs typeface="Calibri"/>
                 <a:sym typeface="Calibri"/>
@@ -5929,7 +5929,7 @@
                 <a:solidFill>
                   <a:srgbClr val="4F7B4F"/>
                 </a:solidFill>
-                <a:latin typeface="Karla"/>
+                <a:latin typeface="Calibri"/>
                 <a:ea typeface="Calibri"/>
                 <a:cs typeface="Calibri"/>
                 <a:sym typeface="Calibri"/>
@@ -5992,7 +5992,7 @@
                 <a:solidFill>
                   <a:srgbClr val="899B86"/>
                 </a:solidFill>
-                <a:latin typeface="Karla"/>
+                <a:latin typeface="Calibri"/>
                 <a:ea typeface="Calibri"/>
                 <a:cs typeface="Calibri"/>
                 <a:sym typeface="Calibri"/>
@@ -6039,7 +6039,7 @@
                 <a:solidFill>
                   <a:srgbClr val="8B9179"/>
                 </a:solidFill>
-                <a:latin typeface="Karla"/>
+                <a:latin typeface="Calibri"/>
               </a:rPr>
               <a:t>The Pastoral Guide</a:t>
             </a:r>
@@ -6170,7 +6170,7 @@
                 <a:solidFill>
                   <a:srgbClr val="B1C69A"/>
                 </a:solidFill>
-                <a:latin typeface="Karla"/>
+                <a:latin typeface="Calibri"/>
                 <a:ea typeface="Calibri"/>
                 <a:cs typeface="Calibri"/>
                 <a:sym typeface="Calibri"/>
@@ -6229,11 +6229,11 @@
               <a:buNone/>
             </a:pPr>
             <a:r>
-              <a:rPr b="1" i="0" lang="en-US" sz="3000" u="none" cap="none" strike="noStrike">
+              <a:rPr b="0" i="0" lang="en-US" sz="3000" u="none" cap="none" strike="noStrike">
                 <a:solidFill>
                   <a:srgbClr val="41A45D"/>
                 </a:solidFill>
-                <a:latin typeface="Libre Caslon Display"/>
+                <a:latin typeface="Georgia"/>
                 <a:ea typeface="Cambria"/>
                 <a:cs typeface="Cambria"/>
                 <a:sym typeface="Cambria"/>
@@ -6296,7 +6296,7 @@
                 <a:solidFill>
                   <a:srgbClr val="899B86"/>
                 </a:solidFill>
-                <a:latin typeface="Karla"/>
+                <a:latin typeface="Calibri"/>
                 <a:ea typeface="Calibri"/>
                 <a:cs typeface="Calibri"/>
                 <a:sym typeface="Calibri"/>
@@ -6409,7 +6409,7 @@
                 <a:solidFill>
                   <a:srgbClr val="FFFFFF"/>
                 </a:solidFill>
-                <a:latin typeface="Karla"/>
+                <a:latin typeface="Calibri"/>
                 <a:ea typeface="Calibri"/>
                 <a:cs typeface="Calibri"/>
                 <a:sym typeface="Calibri"/>
@@ -6522,7 +6522,7 @@
                 <a:solidFill>
                   <a:srgbClr val="FFFFFF"/>
                 </a:solidFill>
-                <a:latin typeface="Karla"/>
+                <a:latin typeface="Calibri"/>
                 <a:ea typeface="Calibri"/>
                 <a:cs typeface="Calibri"/>
                 <a:sym typeface="Calibri"/>
@@ -6635,7 +6635,7 @@
                 <a:solidFill>
                   <a:srgbClr val="FFFFFF"/>
                 </a:solidFill>
-                <a:latin typeface="Karla"/>
+                <a:latin typeface="Calibri"/>
                 <a:ea typeface="Calibri"/>
                 <a:cs typeface="Calibri"/>
                 <a:sym typeface="Calibri"/>
@@ -6748,7 +6748,7 @@
                 <a:solidFill>
                   <a:srgbClr val="FFFFFF"/>
                 </a:solidFill>
-                <a:latin typeface="Karla"/>
+                <a:latin typeface="Calibri"/>
                 <a:ea typeface="Calibri"/>
                 <a:cs typeface="Calibri"/>
                 <a:sym typeface="Calibri"/>
@@ -6861,7 +6861,7 @@
                 <a:solidFill>
                   <a:srgbClr val="FFFFFF"/>
                 </a:solidFill>
-                <a:latin typeface="Karla"/>
+                <a:latin typeface="Calibri"/>
                 <a:ea typeface="Calibri"/>
                 <a:cs typeface="Calibri"/>
                 <a:sym typeface="Calibri"/>
@@ -6974,7 +6974,7 @@
                 <a:solidFill>
                   <a:srgbClr val="FFFFFF"/>
                 </a:solidFill>
-                <a:latin typeface="Karla"/>
+                <a:latin typeface="Calibri"/>
                 <a:ea typeface="Calibri"/>
                 <a:cs typeface="Calibri"/>
                 <a:sym typeface="Calibri"/>
@@ -8054,7 +8054,7 @@
                 <a:solidFill>
                   <a:srgbClr val="4F7B4F"/>
                 </a:solidFill>
-                <a:latin typeface="Karla"/>
+                <a:latin typeface="Calibri"/>
                 <a:ea typeface="Calibri"/>
                 <a:cs typeface="Calibri"/>
                 <a:sym typeface="Calibri"/>
@@ -8117,7 +8117,7 @@
                 <a:solidFill>
                   <a:srgbClr val="899B86"/>
                 </a:solidFill>
-                <a:latin typeface="Karla"/>
+                <a:latin typeface="Calibri"/>
                 <a:ea typeface="Calibri"/>
                 <a:cs typeface="Calibri"/>
                 <a:sym typeface="Calibri"/>
@@ -8164,7 +8164,7 @@
                 <a:solidFill>
                   <a:srgbClr val="8B9179"/>
                 </a:solidFill>
-                <a:latin typeface="Karla"/>
+                <a:latin typeface="Calibri"/>
               </a:rPr>
               <a:t>The Pastoral Guide</a:t>
             </a:r>
@@ -8295,7 +8295,7 @@
                 <a:solidFill>
                   <a:srgbClr val="B1C69A"/>
                 </a:solidFill>
-                <a:latin typeface="Karla"/>
+                <a:latin typeface="Calibri"/>
                 <a:ea typeface="Calibri"/>
                 <a:cs typeface="Calibri"/>
                 <a:sym typeface="Calibri"/>
@@ -8354,11 +8354,11 @@
               <a:buNone/>
             </a:pPr>
             <a:r>
-              <a:rPr b="1" i="0" lang="en-US" sz="3000" u="none" cap="none" strike="noStrike">
+              <a:rPr b="0" i="0" lang="en-US" sz="3000" u="none" cap="none" strike="noStrike">
                 <a:solidFill>
                   <a:srgbClr val="41A45D"/>
                 </a:solidFill>
-                <a:latin typeface="Libre Caslon Display"/>
+                <a:latin typeface="Georgia"/>
                 <a:ea typeface="Cambria"/>
                 <a:cs typeface="Cambria"/>
                 <a:sym typeface="Cambria"/>
@@ -8534,11 +8534,11 @@
               <a:buNone/>
             </a:pPr>
             <a:r>
-              <a:rPr b="1" i="0" lang="en-US" sz="1250" u="none" cap="none" strike="noStrike">
+              <a:rPr b="0" i="0" lang="en-US" sz="1250" u="none" cap="none" strike="noStrike">
                 <a:solidFill>
                   <a:srgbClr val="41A45D"/>
                 </a:solidFill>
-                <a:latin typeface="Libre Caslon Display"/>
+                <a:latin typeface="Georgia"/>
                 <a:ea typeface="Cambria"/>
                 <a:cs typeface="Cambria"/>
                 <a:sym typeface="Cambria"/>
@@ -8601,7 +8601,7 @@
                 <a:solidFill>
                   <a:srgbClr val="4F7B4F"/>
                 </a:solidFill>
-                <a:latin typeface="Karla"/>
+                <a:latin typeface="Calibri"/>
                 <a:ea typeface="Calibri"/>
                 <a:cs typeface="Calibri"/>
                 <a:sym typeface="Calibri"/>
@@ -8777,11 +8777,11 @@
               <a:buNone/>
             </a:pPr>
             <a:r>
-              <a:rPr b="1" i="0" lang="en-US" sz="1250" u="none" cap="none" strike="noStrike">
+              <a:rPr b="0" i="0" lang="en-US" sz="1250" u="none" cap="none" strike="noStrike">
                 <a:solidFill>
                   <a:srgbClr val="41A45D"/>
                 </a:solidFill>
-                <a:latin typeface="Libre Caslon Display"/>
+                <a:latin typeface="Georgia"/>
                 <a:ea typeface="Cambria"/>
                 <a:cs typeface="Cambria"/>
                 <a:sym typeface="Cambria"/>
@@ -8844,7 +8844,7 @@
                 <a:solidFill>
                   <a:srgbClr val="4F7B4F"/>
                 </a:solidFill>
-                <a:latin typeface="Karla"/>
+                <a:latin typeface="Calibri"/>
                 <a:ea typeface="Calibri"/>
                 <a:cs typeface="Calibri"/>
                 <a:sym typeface="Calibri"/>
@@ -9020,11 +9020,11 @@
               <a:buNone/>
             </a:pPr>
             <a:r>
-              <a:rPr b="1" i="0" lang="en-US" sz="1250" u="none" cap="none" strike="noStrike">
+              <a:rPr b="0" i="0" lang="en-US" sz="1250" u="none" cap="none" strike="noStrike">
                 <a:solidFill>
                   <a:srgbClr val="41A45D"/>
                 </a:solidFill>
-                <a:latin typeface="Libre Caslon Display"/>
+                <a:latin typeface="Georgia"/>
                 <a:ea typeface="Cambria"/>
                 <a:cs typeface="Cambria"/>
                 <a:sym typeface="Cambria"/>
@@ -9087,7 +9087,7 @@
                 <a:solidFill>
                   <a:srgbClr val="4F7B4F"/>
                 </a:solidFill>
-                <a:latin typeface="Karla"/>
+                <a:latin typeface="Calibri"/>
                 <a:ea typeface="Calibri"/>
                 <a:cs typeface="Calibri"/>
                 <a:sym typeface="Calibri"/>
@@ -9263,11 +9263,11 @@
               <a:buNone/>
             </a:pPr>
             <a:r>
-              <a:rPr b="1" i="0" lang="en-US" sz="1250" u="none" cap="none" strike="noStrike">
+              <a:rPr b="0" i="0" lang="en-US" sz="1250" u="none" cap="none" strike="noStrike">
                 <a:solidFill>
                   <a:srgbClr val="41A45D"/>
                 </a:solidFill>
-                <a:latin typeface="Libre Caslon Display"/>
+                <a:latin typeface="Georgia"/>
                 <a:ea typeface="Cambria"/>
                 <a:cs typeface="Cambria"/>
                 <a:sym typeface="Cambria"/>
@@ -9330,7 +9330,7 @@
                 <a:solidFill>
                   <a:srgbClr val="4F7B4F"/>
                 </a:solidFill>
-                <a:latin typeface="Karla"/>
+                <a:latin typeface="Calibri"/>
                 <a:ea typeface="Calibri"/>
                 <a:cs typeface="Calibri"/>
                 <a:sym typeface="Calibri"/>
@@ -9506,11 +9506,11 @@
               <a:buNone/>
             </a:pPr>
             <a:r>
-              <a:rPr b="1" i="0" lang="en-US" sz="1250" u="none" cap="none" strike="noStrike">
+              <a:rPr b="0" i="0" lang="en-US" sz="1250" u="none" cap="none" strike="noStrike">
                 <a:solidFill>
                   <a:srgbClr val="41A45D"/>
                 </a:solidFill>
-                <a:latin typeface="Libre Caslon Display"/>
+                <a:latin typeface="Georgia"/>
                 <a:ea typeface="Cambria"/>
                 <a:cs typeface="Cambria"/>
                 <a:sym typeface="Cambria"/>
@@ -9573,7 +9573,7 @@
                 <a:solidFill>
                   <a:srgbClr val="4F7B4F"/>
                 </a:solidFill>
-                <a:latin typeface="Karla"/>
+                <a:latin typeface="Calibri"/>
                 <a:ea typeface="Calibri"/>
                 <a:cs typeface="Calibri"/>
                 <a:sym typeface="Calibri"/>
@@ -9749,11 +9749,11 @@
               <a:buNone/>
             </a:pPr>
             <a:r>
-              <a:rPr b="1" i="0" lang="en-US" sz="1250" u="none" cap="none" strike="noStrike">
+              <a:rPr b="0" i="0" lang="en-US" sz="1250" u="none" cap="none" strike="noStrike">
                 <a:solidFill>
                   <a:srgbClr val="41A45D"/>
                 </a:solidFill>
-                <a:latin typeface="Libre Caslon Display"/>
+                <a:latin typeface="Georgia"/>
                 <a:ea typeface="Cambria"/>
                 <a:cs typeface="Cambria"/>
                 <a:sym typeface="Cambria"/>
@@ -9816,7 +9816,7 @@
                 <a:solidFill>
                   <a:srgbClr val="4F7B4F"/>
                 </a:solidFill>
-                <a:latin typeface="Karla"/>
+                <a:latin typeface="Calibri"/>
                 <a:ea typeface="Calibri"/>
                 <a:cs typeface="Calibri"/>
                 <a:sym typeface="Calibri"/>
@@ -9879,7 +9879,7 @@
                 <a:solidFill>
                   <a:srgbClr val="B1C69A"/>
                 </a:solidFill>
-                <a:latin typeface="Karla"/>
+                <a:latin typeface="Calibri"/>
                 <a:ea typeface="Calibri"/>
                 <a:cs typeface="Calibri"/>
                 <a:sym typeface="Calibri"/>
@@ -9988,7 +9988,7 @@
                 <a:solidFill>
                   <a:srgbClr val="A3532A"/>
                 </a:solidFill>
-                <a:latin typeface="Karla"/>
+                <a:latin typeface="Calibri"/>
                 <a:ea typeface="Calibri"/>
                 <a:cs typeface="Calibri"/>
                 <a:sym typeface="Calibri"/>
@@ -10097,7 +10097,7 @@
                 <a:solidFill>
                   <a:srgbClr val="A3532A"/>
                 </a:solidFill>
-                <a:latin typeface="Karla"/>
+                <a:latin typeface="Calibri"/>
                 <a:ea typeface="Calibri"/>
                 <a:cs typeface="Calibri"/>
                 <a:sym typeface="Calibri"/>
@@ -10206,7 +10206,7 @@
                 <a:solidFill>
                   <a:srgbClr val="A3532A"/>
                 </a:solidFill>
-                <a:latin typeface="Karla"/>
+                <a:latin typeface="Calibri"/>
                 <a:ea typeface="Calibri"/>
                 <a:cs typeface="Calibri"/>
                 <a:sym typeface="Calibri"/>
@@ -10315,7 +10315,7 @@
                 <a:solidFill>
                   <a:srgbClr val="A3532A"/>
                 </a:solidFill>
-                <a:latin typeface="Karla"/>
+                <a:latin typeface="Calibri"/>
                 <a:ea typeface="Calibri"/>
                 <a:cs typeface="Calibri"/>
                 <a:sym typeface="Calibri"/>
@@ -10424,7 +10424,7 @@
                 <a:solidFill>
                   <a:srgbClr val="A3532A"/>
                 </a:solidFill>
-                <a:latin typeface="Karla"/>
+                <a:latin typeface="Calibri"/>
                 <a:ea typeface="Calibri"/>
                 <a:cs typeface="Calibri"/>
                 <a:sym typeface="Calibri"/>
@@ -10533,7 +10533,7 @@
                 <a:solidFill>
                   <a:srgbClr val="A3532A"/>
                 </a:solidFill>
-                <a:latin typeface="Karla"/>
+                <a:latin typeface="Calibri"/>
                 <a:ea typeface="Calibri"/>
                 <a:cs typeface="Calibri"/>
                 <a:sym typeface="Calibri"/>
@@ -10596,7 +10596,7 @@
                 <a:solidFill>
                   <a:srgbClr val="899B86"/>
                 </a:solidFill>
-                <a:latin typeface="Karla"/>
+                <a:latin typeface="Calibri"/>
                 <a:ea typeface="Calibri"/>
                 <a:cs typeface="Calibri"/>
                 <a:sym typeface="Calibri"/>
@@ -10643,7 +10643,7 @@
                 <a:solidFill>
                   <a:srgbClr val="8B9179"/>
                 </a:solidFill>
-                <a:latin typeface="Karla"/>
+                <a:latin typeface="Calibri"/>
               </a:rPr>
               <a:t>The Pastoral Guide</a:t>
             </a:r>
@@ -10770,11 +10770,11 @@
               <a:buNone/>
             </a:pPr>
             <a:r>
-              <a:rPr b="1" i="0" lang="en-US" sz="3000" u="none" cap="none" strike="noStrike">
+              <a:rPr b="0" i="0" lang="en-US" sz="3000" u="none" cap="none" strike="noStrike">
                 <a:solidFill>
                   <a:srgbClr val="5E8B6E"/>
                 </a:solidFill>
-                <a:latin typeface="Libre Caslon Display"/>
+                <a:latin typeface="Georgia"/>
                 <a:ea typeface="Cambria"/>
                 <a:cs typeface="Cambria"/>
                 <a:sym typeface="Cambria"/>
@@ -10837,7 +10837,7 @@
                 <a:solidFill>
                   <a:srgbClr val="5C6552"/>
                 </a:solidFill>
-                <a:latin typeface="Karla"/>
+                <a:latin typeface="Calibri"/>
                 <a:ea typeface="Calibri"/>
                 <a:cs typeface="Calibri"/>
                 <a:sym typeface="Calibri"/>
@@ -10971,7 +10971,7 @@
                 <a:solidFill>
                   <a:srgbClr val="4F7B4F"/>
                 </a:solidFill>
-                <a:latin typeface="Karla"/>
+                <a:latin typeface="Calibri"/>
                 <a:ea typeface="Calibri"/>
                 <a:cs typeface="Calibri"/>
                 <a:sym typeface="Calibri"/>
@@ -11105,7 +11105,7 @@
                 <a:solidFill>
                   <a:srgbClr val="4F7B4F"/>
                 </a:solidFill>
-                <a:latin typeface="Karla"/>
+                <a:latin typeface="Calibri"/>
                 <a:ea typeface="Calibri"/>
                 <a:cs typeface="Calibri"/>
                 <a:sym typeface="Calibri"/>
@@ -11239,7 +11239,7 @@
                 <a:solidFill>
                   <a:srgbClr val="4F7B4F"/>
                 </a:solidFill>
-                <a:latin typeface="Karla"/>
+                <a:latin typeface="Calibri"/>
                 <a:ea typeface="Calibri"/>
                 <a:cs typeface="Calibri"/>
                 <a:sym typeface="Calibri"/>
@@ -11373,7 +11373,7 @@
                 <a:solidFill>
                   <a:srgbClr val="4F7B4F"/>
                 </a:solidFill>
-                <a:latin typeface="Karla"/>
+                <a:latin typeface="Calibri"/>
                 <a:ea typeface="Calibri"/>
                 <a:cs typeface="Calibri"/>
                 <a:sym typeface="Calibri"/>
@@ -11507,7 +11507,7 @@
                 <a:solidFill>
                   <a:srgbClr val="4F7B4F"/>
                 </a:solidFill>
-                <a:latin typeface="Karla"/>
+                <a:latin typeface="Calibri"/>
                 <a:ea typeface="Calibri"/>
                 <a:cs typeface="Calibri"/>
                 <a:sym typeface="Calibri"/>
@@ -11612,11 +11612,11 @@
               <a:buNone/>
             </a:pPr>
             <a:r>
-              <a:rPr b="1" i="1" lang="en-US" sz="1400" u="none" cap="none" strike="noStrike">
+              <a:rPr b="0" i="1" lang="en-US" sz="1400" u="none" cap="none" strike="noStrike">
                 <a:solidFill>
                   <a:srgbClr val="41A45D"/>
                 </a:solidFill>
-                <a:latin typeface="Libre Caslon Display"/>
+                <a:latin typeface="Georgia"/>
                 <a:ea typeface="Cambria"/>
                 <a:cs typeface="Cambria"/>
                 <a:sym typeface="Cambria"/>
@@ -11679,7 +11679,7 @@
                 <a:solidFill>
                   <a:srgbClr val="899B86"/>
                 </a:solidFill>
-                <a:latin typeface="Karla"/>
+                <a:latin typeface="Calibri"/>
                 <a:ea typeface="Calibri"/>
                 <a:cs typeface="Calibri"/>
                 <a:sym typeface="Calibri"/>
@@ -11726,7 +11726,7 @@
                 <a:solidFill>
                   <a:srgbClr val="8B9179"/>
                 </a:solidFill>
-                <a:latin typeface="Karla"/>
+                <a:latin typeface="Calibri"/>
               </a:rPr>
               <a:t>The Pastoral Guide</a:t>
             </a:r>
@@ -11881,7 +11881,7 @@
                 <a:solidFill>
                   <a:srgbClr val="B1C69A"/>
                 </a:solidFill>
-                <a:latin typeface="Karla"/>
+                <a:latin typeface="Calibri"/>
                 <a:ea typeface="Calibri"/>
                 <a:cs typeface="Calibri"/>
                 <a:sym typeface="Calibri"/>
@@ -11940,11 +11940,11 @@
               <a:buNone/>
             </a:pPr>
             <a:r>
-              <a:rPr b="1" i="0" lang="en-US" sz="3000" u="none" cap="none" strike="noStrike">
+              <a:rPr b="0" i="0" lang="en-US" sz="3000" u="none" cap="none" strike="noStrike">
                 <a:solidFill>
                   <a:srgbClr val="41A45D"/>
                 </a:solidFill>
-                <a:latin typeface="Libre Caslon Display"/>
+                <a:latin typeface="Georgia"/>
                 <a:ea typeface="Cambria"/>
                 <a:cs typeface="Cambria"/>
                 <a:sym typeface="Cambria"/>
@@ -12007,7 +12007,7 @@
                 <a:solidFill>
                   <a:srgbClr val="899B86"/>
                 </a:solidFill>
-                <a:latin typeface="Karla"/>
+                <a:latin typeface="Calibri"/>
                 <a:ea typeface="Calibri"/>
                 <a:cs typeface="Calibri"/>
                 <a:sym typeface="Calibri"/>
@@ -12185,7 +12185,7 @@
                 <a:solidFill>
                   <a:srgbClr val="4F7B4F"/>
                 </a:solidFill>
-                <a:latin typeface="Karla"/>
+                <a:latin typeface="Calibri"/>
                 <a:ea typeface="Calibri"/>
                 <a:cs typeface="Calibri"/>
                 <a:sym typeface="Calibri"/>
@@ -12319,7 +12319,7 @@
                 <a:solidFill>
                   <a:srgbClr val="4F7B4F"/>
                 </a:solidFill>
-                <a:latin typeface="Karla"/>
+                <a:latin typeface="Calibri"/>
                 <a:ea typeface="Calibri"/>
                 <a:cs typeface="Calibri"/>
                 <a:sym typeface="Calibri"/>
@@ -12497,7 +12497,7 @@
                 <a:solidFill>
                   <a:srgbClr val="4F7B4F"/>
                 </a:solidFill>
-                <a:latin typeface="Karla"/>
+                <a:latin typeface="Calibri"/>
                 <a:ea typeface="Calibri"/>
                 <a:cs typeface="Calibri"/>
                 <a:sym typeface="Calibri"/>
@@ -12631,7 +12631,7 @@
                 <a:solidFill>
                   <a:srgbClr val="4F7B4F"/>
                 </a:solidFill>
-                <a:latin typeface="Karla"/>
+                <a:latin typeface="Calibri"/>
                 <a:ea typeface="Calibri"/>
                 <a:cs typeface="Calibri"/>
                 <a:sym typeface="Calibri"/>
@@ -12809,7 +12809,7 @@
                 <a:solidFill>
                   <a:srgbClr val="4F7B4F"/>
                 </a:solidFill>
-                <a:latin typeface="Karla"/>
+                <a:latin typeface="Calibri"/>
                 <a:ea typeface="Calibri"/>
                 <a:cs typeface="Calibri"/>
                 <a:sym typeface="Calibri"/>
@@ -12943,7 +12943,7 @@
                 <a:solidFill>
                   <a:srgbClr val="4F7B4F"/>
                 </a:solidFill>
-                <a:latin typeface="Karla"/>
+                <a:latin typeface="Calibri"/>
                 <a:ea typeface="Calibri"/>
                 <a:cs typeface="Calibri"/>
                 <a:sym typeface="Calibri"/>
@@ -13121,7 +13121,7 @@
                 <a:solidFill>
                   <a:srgbClr val="4F7B4F"/>
                 </a:solidFill>
-                <a:latin typeface="Karla"/>
+                <a:latin typeface="Calibri"/>
                 <a:ea typeface="Calibri"/>
                 <a:cs typeface="Calibri"/>
                 <a:sym typeface="Calibri"/>
@@ -13184,7 +13184,7 @@
                 <a:solidFill>
                   <a:srgbClr val="899B86"/>
                 </a:solidFill>
-                <a:latin typeface="Karla"/>
+                <a:latin typeface="Calibri"/>
                 <a:ea typeface="Calibri"/>
                 <a:cs typeface="Calibri"/>
                 <a:sym typeface="Calibri"/>
@@ -13231,7 +13231,7 @@
                 <a:solidFill>
                   <a:srgbClr val="8B9179"/>
                 </a:solidFill>
-                <a:latin typeface="Karla"/>
+                <a:latin typeface="Calibri"/>
               </a:rPr>
               <a:t>The Pastoral Guide</a:t>
             </a:r>
@@ -13362,7 +13362,7 @@
                 <a:solidFill>
                   <a:srgbClr val="B1C69A"/>
                 </a:solidFill>
-                <a:latin typeface="Karla"/>
+                <a:latin typeface="Calibri"/>
                 <a:ea typeface="Calibri"/>
                 <a:cs typeface="Calibri"/>
                 <a:sym typeface="Calibri"/>
@@ -13421,11 +13421,11 @@
               <a:buNone/>
             </a:pPr>
             <a:r>
-              <a:rPr b="1" i="0" lang="en-US" sz="3000" u="none" cap="none" strike="noStrike">
+              <a:rPr b="0" i="0" lang="en-US" sz="3000" u="none" cap="none" strike="noStrike">
                 <a:solidFill>
                   <a:srgbClr val="41A45D"/>
                 </a:solidFill>
-                <a:latin typeface="Libre Caslon Display"/>
+                <a:latin typeface="Georgia"/>
                 <a:ea typeface="Cambria"/>
                 <a:cs typeface="Cambria"/>
                 <a:sym typeface="Cambria"/>
@@ -13601,11 +13601,11 @@
               <a:buNone/>
             </a:pPr>
             <a:r>
-              <a:rPr b="1" i="0" lang="en-US" sz="1400" u="none" cap="none" strike="noStrike">
+              <a:rPr b="0" i="0" lang="en-US" sz="1400" u="none" cap="none" strike="noStrike">
                 <a:solidFill>
                   <a:srgbClr val="41A45D"/>
                 </a:solidFill>
-                <a:latin typeface="Libre Caslon Display"/>
+                <a:latin typeface="Georgia"/>
                 <a:ea typeface="Cambria"/>
                 <a:cs typeface="Cambria"/>
                 <a:sym typeface="Cambria"/>
@@ -13668,7 +13668,7 @@
                 <a:solidFill>
                   <a:srgbClr val="4F7B4F"/>
                 </a:solidFill>
-                <a:latin typeface="Karla"/>
+                <a:latin typeface="Calibri"/>
                 <a:ea typeface="Calibri"/>
                 <a:cs typeface="Calibri"/>
                 <a:sym typeface="Calibri"/>
@@ -13844,11 +13844,11 @@
               <a:buNone/>
             </a:pPr>
             <a:r>
-              <a:rPr b="1" i="0" lang="en-US" sz="1400" u="none" cap="none" strike="noStrike">
+              <a:rPr b="0" i="0" lang="en-US" sz="1400" u="none" cap="none" strike="noStrike">
                 <a:solidFill>
                   <a:srgbClr val="41A45D"/>
                 </a:solidFill>
-                <a:latin typeface="Libre Caslon Display"/>
+                <a:latin typeface="Georgia"/>
                 <a:ea typeface="Cambria"/>
                 <a:cs typeface="Cambria"/>
                 <a:sym typeface="Cambria"/>
@@ -13911,7 +13911,7 @@
                 <a:solidFill>
                   <a:srgbClr val="4F7B4F"/>
                 </a:solidFill>
-                <a:latin typeface="Karla"/>
+                <a:latin typeface="Calibri"/>
                 <a:ea typeface="Calibri"/>
                 <a:cs typeface="Calibri"/>
                 <a:sym typeface="Calibri"/>
@@ -14087,11 +14087,11 @@
               <a:buNone/>
             </a:pPr>
             <a:r>
-              <a:rPr b="1" i="0" lang="en-US" sz="1400" u="none" cap="none" strike="noStrike">
+              <a:rPr b="0" i="0" lang="en-US" sz="1400" u="none" cap="none" strike="noStrike">
                 <a:solidFill>
                   <a:srgbClr val="41A45D"/>
                 </a:solidFill>
-                <a:latin typeface="Libre Caslon Display"/>
+                <a:latin typeface="Georgia"/>
                 <a:ea typeface="Cambria"/>
                 <a:cs typeface="Cambria"/>
                 <a:sym typeface="Cambria"/>
@@ -14154,7 +14154,7 @@
                 <a:solidFill>
                   <a:srgbClr val="4F7B4F"/>
                 </a:solidFill>
-                <a:latin typeface="Karla"/>
+                <a:latin typeface="Calibri"/>
                 <a:ea typeface="Calibri"/>
                 <a:cs typeface="Calibri"/>
                 <a:sym typeface="Calibri"/>
@@ -14330,11 +14330,11 @@
               <a:buNone/>
             </a:pPr>
             <a:r>
-              <a:rPr b="1" i="0" lang="en-US" sz="1400" u="none" cap="none" strike="noStrike">
+              <a:rPr b="0" i="0" lang="en-US" sz="1400" u="none" cap="none" strike="noStrike">
                 <a:solidFill>
                   <a:srgbClr val="41A45D"/>
                 </a:solidFill>
-                <a:latin typeface="Libre Caslon Display"/>
+                <a:latin typeface="Georgia"/>
                 <a:ea typeface="Cambria"/>
                 <a:cs typeface="Cambria"/>
                 <a:sym typeface="Cambria"/>
@@ -14397,7 +14397,7 @@
                 <a:solidFill>
                   <a:srgbClr val="4F7B4F"/>
                 </a:solidFill>
-                <a:latin typeface="Karla"/>
+                <a:latin typeface="Calibri"/>
                 <a:ea typeface="Calibri"/>
                 <a:cs typeface="Calibri"/>
                 <a:sym typeface="Calibri"/>
@@ -14573,11 +14573,11 @@
               <a:buNone/>
             </a:pPr>
             <a:r>
-              <a:rPr b="1" i="0" lang="en-US" sz="1400" u="none" cap="none" strike="noStrike">
+              <a:rPr b="0" i="0" lang="en-US" sz="1400" u="none" cap="none" strike="noStrike">
                 <a:solidFill>
                   <a:srgbClr val="41A45D"/>
                 </a:solidFill>
-                <a:latin typeface="Libre Caslon Display"/>
+                <a:latin typeface="Georgia"/>
                 <a:ea typeface="Cambria"/>
                 <a:cs typeface="Cambria"/>
                 <a:sym typeface="Cambria"/>
@@ -14640,7 +14640,7 @@
                 <a:solidFill>
                   <a:srgbClr val="4F7B4F"/>
                 </a:solidFill>
-                <a:latin typeface="Karla"/>
+                <a:latin typeface="Calibri"/>
                 <a:ea typeface="Calibri"/>
                 <a:cs typeface="Calibri"/>
                 <a:sym typeface="Calibri"/>
@@ -14816,11 +14816,11 @@
               <a:buNone/>
             </a:pPr>
             <a:r>
-              <a:rPr b="1" i="0" lang="en-US" sz="1400" u="none" cap="none" strike="noStrike">
+              <a:rPr b="0" i="0" lang="en-US" sz="1400" u="none" cap="none" strike="noStrike">
                 <a:solidFill>
                   <a:srgbClr val="41A45D"/>
                 </a:solidFill>
-                <a:latin typeface="Libre Caslon Display"/>
+                <a:latin typeface="Georgia"/>
                 <a:ea typeface="Cambria"/>
                 <a:cs typeface="Cambria"/>
                 <a:sym typeface="Cambria"/>
@@ -14883,7 +14883,7 @@
                 <a:solidFill>
                   <a:srgbClr val="4F7B4F"/>
                 </a:solidFill>
-                <a:latin typeface="Karla"/>
+                <a:latin typeface="Calibri"/>
                 <a:ea typeface="Calibri"/>
                 <a:cs typeface="Calibri"/>
                 <a:sym typeface="Calibri"/>
@@ -14946,7 +14946,7 @@
                 <a:solidFill>
                   <a:srgbClr val="899B86"/>
                 </a:solidFill>
-                <a:latin typeface="Karla"/>
+                <a:latin typeface="Calibri"/>
                 <a:ea typeface="Calibri"/>
                 <a:cs typeface="Calibri"/>
                 <a:sym typeface="Calibri"/>
@@ -14993,7 +14993,7 @@
                 <a:solidFill>
                   <a:srgbClr val="8B9179"/>
                 </a:solidFill>
-                <a:latin typeface="Karla"/>
+                <a:latin typeface="Calibri"/>
               </a:rPr>
               <a:t>The Pastoral Guide</a:t>
             </a:r>
@@ -15124,7 +15124,7 @@
                 <a:solidFill>
                   <a:srgbClr val="B1C69A"/>
                 </a:solidFill>
-                <a:latin typeface="Karla"/>
+                <a:latin typeface="Calibri"/>
                 <a:ea typeface="Calibri"/>
                 <a:cs typeface="Calibri"/>
                 <a:sym typeface="Calibri"/>
@@ -15183,11 +15183,11 @@
               <a:buNone/>
             </a:pPr>
             <a:r>
-              <a:rPr b="1" i="0" lang="en-US" sz="3000" u="none" cap="none" strike="noStrike">
+              <a:rPr b="0" i="0" lang="en-US" sz="3000" u="none" cap="none" strike="noStrike">
                 <a:solidFill>
                   <a:srgbClr val="41A45D"/>
                 </a:solidFill>
-                <a:latin typeface="Libre Caslon Display"/>
+                <a:latin typeface="Georgia"/>
                 <a:ea typeface="Cambria"/>
                 <a:cs typeface="Cambria"/>
                 <a:sym typeface="Cambria"/>
@@ -15363,11 +15363,11 @@
               <a:buNone/>
             </a:pPr>
             <a:r>
-              <a:rPr b="1" i="0" lang="en-US" sz="1200" u="none" cap="none" strike="noStrike">
+              <a:rPr b="0" i="0" lang="en-US" sz="1200" u="none" cap="none" strike="noStrike">
                 <a:solidFill>
                   <a:srgbClr val="41A45D"/>
                 </a:solidFill>
-                <a:latin typeface="Libre Caslon Display"/>
+                <a:latin typeface="Georgia"/>
                 <a:ea typeface="Cambria"/>
                 <a:cs typeface="Cambria"/>
                 <a:sym typeface="Cambria"/>
@@ -15430,7 +15430,7 @@
                 <a:solidFill>
                   <a:srgbClr val="899B86"/>
                 </a:solidFill>
-                <a:latin typeface="Karla"/>
+                <a:latin typeface="Calibri"/>
                 <a:ea typeface="Calibri"/>
                 <a:cs typeface="Calibri"/>
                 <a:sym typeface="Calibri"/>
@@ -15606,11 +15606,11 @@
               <a:buNone/>
             </a:pPr>
             <a:r>
-              <a:rPr b="1" i="0" lang="en-US" sz="1200" u="none" cap="none" strike="noStrike">
+              <a:rPr b="0" i="0" lang="en-US" sz="1200" u="none" cap="none" strike="noStrike">
                 <a:solidFill>
                   <a:srgbClr val="41A45D"/>
                 </a:solidFill>
-                <a:latin typeface="Libre Caslon Display"/>
+                <a:latin typeface="Georgia"/>
                 <a:ea typeface="Cambria"/>
                 <a:cs typeface="Cambria"/>
                 <a:sym typeface="Cambria"/>
@@ -15673,7 +15673,7 @@
                 <a:solidFill>
                   <a:srgbClr val="899B86"/>
                 </a:solidFill>
-                <a:latin typeface="Karla"/>
+                <a:latin typeface="Calibri"/>
                 <a:ea typeface="Calibri"/>
                 <a:cs typeface="Calibri"/>
                 <a:sym typeface="Calibri"/>
@@ -15849,11 +15849,11 @@
               <a:buNone/>
             </a:pPr>
             <a:r>
-              <a:rPr b="1" i="0" lang="en-US" sz="1200" u="none" cap="none" strike="noStrike">
+              <a:rPr b="0" i="0" lang="en-US" sz="1200" u="none" cap="none" strike="noStrike">
                 <a:solidFill>
                   <a:srgbClr val="41A45D"/>
                 </a:solidFill>
-                <a:latin typeface="Libre Caslon Display"/>
+                <a:latin typeface="Georgia"/>
                 <a:ea typeface="Cambria"/>
                 <a:cs typeface="Cambria"/>
                 <a:sym typeface="Cambria"/>
@@ -15916,7 +15916,7 @@
                 <a:solidFill>
                   <a:srgbClr val="899B86"/>
                 </a:solidFill>
-                <a:latin typeface="Karla"/>
+                <a:latin typeface="Calibri"/>
                 <a:ea typeface="Calibri"/>
                 <a:cs typeface="Calibri"/>
                 <a:sym typeface="Calibri"/>
@@ -16092,11 +16092,11 @@
               <a:buNone/>
             </a:pPr>
             <a:r>
-              <a:rPr b="1" i="0" lang="en-US" sz="1200" u="none" cap="none" strike="noStrike">
+              <a:rPr b="0" i="0" lang="en-US" sz="1200" u="none" cap="none" strike="noStrike">
                 <a:solidFill>
                   <a:srgbClr val="41A45D"/>
                 </a:solidFill>
-                <a:latin typeface="Libre Caslon Display"/>
+                <a:latin typeface="Georgia"/>
                 <a:ea typeface="Cambria"/>
                 <a:cs typeface="Cambria"/>
                 <a:sym typeface="Cambria"/>
@@ -16159,7 +16159,7 @@
                 <a:solidFill>
                   <a:srgbClr val="899B86"/>
                 </a:solidFill>
-                <a:latin typeface="Karla"/>
+                <a:latin typeface="Calibri"/>
                 <a:ea typeface="Calibri"/>
                 <a:cs typeface="Calibri"/>
                 <a:sym typeface="Calibri"/>
@@ -16335,11 +16335,11 @@
               <a:buNone/>
             </a:pPr>
             <a:r>
-              <a:rPr b="1" i="0" lang="en-US" sz="1200" u="none" cap="none" strike="noStrike">
+              <a:rPr b="0" i="0" lang="en-US" sz="1200" u="none" cap="none" strike="noStrike">
                 <a:solidFill>
                   <a:srgbClr val="41A45D"/>
                 </a:solidFill>
-                <a:latin typeface="Libre Caslon Display"/>
+                <a:latin typeface="Georgia"/>
                 <a:ea typeface="Cambria"/>
                 <a:cs typeface="Cambria"/>
                 <a:sym typeface="Cambria"/>
@@ -16402,7 +16402,7 @@
                 <a:solidFill>
                   <a:srgbClr val="899B86"/>
                 </a:solidFill>
-                <a:latin typeface="Karla"/>
+                <a:latin typeface="Calibri"/>
                 <a:ea typeface="Calibri"/>
                 <a:cs typeface="Calibri"/>
                 <a:sym typeface="Calibri"/>
@@ -16578,11 +16578,11 @@
               <a:buNone/>
             </a:pPr>
             <a:r>
-              <a:rPr b="1" i="0" lang="en-US" sz="1200" u="none" cap="none" strike="noStrike">
+              <a:rPr b="0" i="0" lang="en-US" sz="1200" u="none" cap="none" strike="noStrike">
                 <a:solidFill>
                   <a:srgbClr val="41A45D"/>
                 </a:solidFill>
-                <a:latin typeface="Libre Caslon Display"/>
+                <a:latin typeface="Georgia"/>
                 <a:ea typeface="Cambria"/>
                 <a:cs typeface="Cambria"/>
                 <a:sym typeface="Cambria"/>
@@ -16645,7 +16645,7 @@
                 <a:solidFill>
                   <a:srgbClr val="899B86"/>
                 </a:solidFill>
-                <a:latin typeface="Karla"/>
+                <a:latin typeface="Calibri"/>
                 <a:ea typeface="Calibri"/>
                 <a:cs typeface="Calibri"/>
                 <a:sym typeface="Calibri"/>
@@ -16821,11 +16821,11 @@
               <a:buNone/>
             </a:pPr>
             <a:r>
-              <a:rPr b="1" i="0" lang="en-US" sz="1200" u="none" cap="none" strike="noStrike">
+              <a:rPr b="0" i="0" lang="en-US" sz="1200" u="none" cap="none" strike="noStrike">
                 <a:solidFill>
                   <a:srgbClr val="41A45D"/>
                 </a:solidFill>
-                <a:latin typeface="Libre Caslon Display"/>
+                <a:latin typeface="Georgia"/>
                 <a:ea typeface="Cambria"/>
                 <a:cs typeface="Cambria"/>
                 <a:sym typeface="Cambria"/>
@@ -16888,7 +16888,7 @@
                 <a:solidFill>
                   <a:srgbClr val="899B86"/>
                 </a:solidFill>
-                <a:latin typeface="Karla"/>
+                <a:latin typeface="Calibri"/>
                 <a:ea typeface="Calibri"/>
                 <a:cs typeface="Calibri"/>
                 <a:sym typeface="Calibri"/>
@@ -17064,11 +17064,11 @@
               <a:buNone/>
             </a:pPr>
             <a:r>
-              <a:rPr b="1" i="0" lang="en-US" sz="1200" u="none" cap="none" strike="noStrike">
+              <a:rPr b="0" i="0" lang="en-US" sz="1200" u="none" cap="none" strike="noStrike">
                 <a:solidFill>
                   <a:srgbClr val="41A45D"/>
                 </a:solidFill>
-                <a:latin typeface="Libre Caslon Display"/>
+                <a:latin typeface="Georgia"/>
                 <a:ea typeface="Cambria"/>
                 <a:cs typeface="Cambria"/>
                 <a:sym typeface="Cambria"/>
@@ -17131,7 +17131,7 @@
                 <a:solidFill>
                   <a:srgbClr val="899B86"/>
                 </a:solidFill>
-                <a:latin typeface="Karla"/>
+                <a:latin typeface="Calibri"/>
                 <a:ea typeface="Calibri"/>
                 <a:cs typeface="Calibri"/>
                 <a:sym typeface="Calibri"/>
@@ -17307,11 +17307,11 @@
               <a:buNone/>
             </a:pPr>
             <a:r>
-              <a:rPr b="1" i="0" lang="en-US" sz="1200" u="none" cap="none" strike="noStrike">
+              <a:rPr b="0" i="0" lang="en-US" sz="1200" u="none" cap="none" strike="noStrike">
                 <a:solidFill>
                   <a:srgbClr val="41A45D"/>
                 </a:solidFill>
-                <a:latin typeface="Libre Caslon Display"/>
+                <a:latin typeface="Georgia"/>
                 <a:ea typeface="Cambria"/>
                 <a:cs typeface="Cambria"/>
                 <a:sym typeface="Cambria"/>
@@ -17374,7 +17374,7 @@
                 <a:solidFill>
                   <a:srgbClr val="899B86"/>
                 </a:solidFill>
-                <a:latin typeface="Karla"/>
+                <a:latin typeface="Calibri"/>
                 <a:ea typeface="Calibri"/>
                 <a:cs typeface="Calibri"/>
                 <a:sym typeface="Calibri"/>
@@ -17550,11 +17550,11 @@
               <a:buNone/>
             </a:pPr>
             <a:r>
-              <a:rPr b="1" i="0" lang="en-US" sz="1200" u="none" cap="none" strike="noStrike">
+              <a:rPr b="0" i="0" lang="en-US" sz="1200" u="none" cap="none" strike="noStrike">
                 <a:solidFill>
                   <a:srgbClr val="41A45D"/>
                 </a:solidFill>
-                <a:latin typeface="Libre Caslon Display"/>
+                <a:latin typeface="Georgia"/>
                 <a:ea typeface="Cambria"/>
                 <a:cs typeface="Cambria"/>
                 <a:sym typeface="Cambria"/>
@@ -17617,7 +17617,7 @@
                 <a:solidFill>
                   <a:srgbClr val="899B86"/>
                 </a:solidFill>
-                <a:latin typeface="Karla"/>
+                <a:latin typeface="Calibri"/>
                 <a:ea typeface="Calibri"/>
                 <a:cs typeface="Calibri"/>
                 <a:sym typeface="Calibri"/>
@@ -17680,7 +17680,7 @@
                 <a:solidFill>
                   <a:srgbClr val="899B86"/>
                 </a:solidFill>
-                <a:latin typeface="Karla"/>
+                <a:latin typeface="Calibri"/>
                 <a:ea typeface="Calibri"/>
                 <a:cs typeface="Calibri"/>
                 <a:sym typeface="Calibri"/>
@@ -17727,7 +17727,7 @@
                 <a:solidFill>
                   <a:srgbClr val="8B9179"/>
                 </a:solidFill>
-                <a:latin typeface="Karla"/>
+                <a:latin typeface="Calibri"/>
               </a:rPr>
               <a:t>The Pastoral Guide</a:t>
             </a:r>
@@ -17858,7 +17858,7 @@
                 <a:solidFill>
                   <a:srgbClr val="B1C69A"/>
                 </a:solidFill>
-                <a:latin typeface="Karla"/>
+                <a:latin typeface="Calibri"/>
                 <a:ea typeface="Calibri"/>
                 <a:cs typeface="Calibri"/>
                 <a:sym typeface="Calibri"/>
@@ -17917,11 +17917,11 @@
               <a:buNone/>
             </a:pPr>
             <a:r>
-              <a:rPr b="1" i="0" lang="en-US" sz="3000" u="none" cap="none" strike="noStrike">
+              <a:rPr b="0" i="0" lang="en-US" sz="3000" u="none" cap="none" strike="noStrike">
                 <a:solidFill>
                   <a:srgbClr val="41A45D"/>
                 </a:solidFill>
-                <a:latin typeface="Libre Caslon Display"/>
+                <a:latin typeface="Georgia"/>
                 <a:ea typeface="Cambria"/>
                 <a:cs typeface="Cambria"/>
                 <a:sym typeface="Cambria"/>
@@ -18058,7 +18058,7 @@
                 <a:solidFill>
                   <a:srgbClr val="4F7B4F"/>
                 </a:solidFill>
-                <a:latin typeface="Karla"/>
+                <a:latin typeface="Calibri"/>
                 <a:ea typeface="Calibri"/>
                 <a:cs typeface="Calibri"/>
                 <a:sym typeface="Calibri"/>
@@ -18121,7 +18121,7 @@
                 <a:solidFill>
                   <a:srgbClr val="899B86"/>
                 </a:solidFill>
-                <a:latin typeface="Karla"/>
+                <a:latin typeface="Calibri"/>
                 <a:ea typeface="Calibri"/>
                 <a:cs typeface="Calibri"/>
                 <a:sym typeface="Calibri"/>
@@ -18184,7 +18184,7 @@
                 <a:solidFill>
                   <a:srgbClr val="899B86"/>
                 </a:solidFill>
-                <a:latin typeface="Karla"/>
+                <a:latin typeface="Calibri"/>
                 <a:ea typeface="Calibri"/>
                 <a:cs typeface="Calibri"/>
                 <a:sym typeface="Calibri"/>
@@ -18259,7 +18259,7 @@
                 <a:solidFill>
                   <a:srgbClr val="8B9179"/>
                 </a:solidFill>
-                <a:latin typeface="Karla"/>
+                <a:latin typeface="Calibri"/>
               </a:rPr>
               <a:t>The Pastoral Guide</a:t>
             </a:r>
@@ -18527,7 +18527,7 @@
                   <a:solidFill>
                     <a:srgbClr val="C9723F"/>
                   </a:solidFill>
-                  <a:latin typeface="Karla"/>
+                  <a:latin typeface="Calibri"/>
                   <a:ea typeface="Calibri"/>
                   <a:cs typeface="Calibri"/>
                   <a:sym typeface="Calibri"/>
@@ -18590,7 +18590,7 @@
                   <a:solidFill>
                     <a:srgbClr val="41A45D"/>
                   </a:solidFill>
-                  <a:latin typeface="Karla"/>
+                  <a:latin typeface="Calibri"/>
                   <a:ea typeface="Calibri"/>
                   <a:cs typeface="Calibri"/>
                   <a:sym typeface="Calibri"/>
@@ -18679,7 +18679,7 @@
                   <a:solidFill>
                     <a:srgbClr val="41A45D"/>
                   </a:solidFill>
-                  <a:latin typeface="Karla"/>
+                  <a:latin typeface="Calibri"/>
                   <a:ea typeface="Calibri"/>
                   <a:cs typeface="Calibri"/>
                   <a:sym typeface="Calibri"/>
@@ -18768,7 +18768,7 @@
                   <a:solidFill>
                     <a:srgbClr val="41A45D"/>
                   </a:solidFill>
-                  <a:latin typeface="Karla"/>
+                  <a:latin typeface="Calibri"/>
                   <a:ea typeface="Calibri"/>
                   <a:cs typeface="Calibri"/>
                   <a:sym typeface="Calibri"/>
@@ -18857,7 +18857,7 @@
                   <a:solidFill>
                     <a:srgbClr val="41A45D"/>
                   </a:solidFill>
-                  <a:latin typeface="Karla"/>
+                  <a:latin typeface="Calibri"/>
                   <a:ea typeface="Calibri"/>
                   <a:cs typeface="Calibri"/>
                   <a:sym typeface="Calibri"/>
@@ -19084,7 +19084,7 @@
                   <a:solidFill>
                     <a:srgbClr val="C9723F"/>
                   </a:solidFill>
-                  <a:latin typeface="Karla"/>
+                  <a:latin typeface="Calibri"/>
                   <a:ea typeface="Calibri"/>
                   <a:cs typeface="Calibri"/>
                   <a:sym typeface="Calibri"/>
@@ -19147,7 +19147,7 @@
                   <a:solidFill>
                     <a:srgbClr val="41A45D"/>
                   </a:solidFill>
-                  <a:latin typeface="Karla"/>
+                  <a:latin typeface="Calibri"/>
                   <a:ea typeface="Calibri"/>
                   <a:cs typeface="Calibri"/>
                   <a:sym typeface="Calibri"/>
@@ -19236,7 +19236,7 @@
                   <a:solidFill>
                     <a:srgbClr val="41A45D"/>
                   </a:solidFill>
-                  <a:latin typeface="Karla"/>
+                  <a:latin typeface="Calibri"/>
                   <a:ea typeface="Calibri"/>
                   <a:cs typeface="Calibri"/>
                   <a:sym typeface="Calibri"/>
@@ -19325,7 +19325,7 @@
                   <a:solidFill>
                     <a:srgbClr val="41A45D"/>
                   </a:solidFill>
-                  <a:latin typeface="Karla"/>
+                  <a:latin typeface="Calibri"/>
                   <a:ea typeface="Calibri"/>
                   <a:cs typeface="Calibri"/>
                   <a:sym typeface="Calibri"/>
@@ -19414,7 +19414,7 @@
                   <a:solidFill>
                     <a:srgbClr val="41A45D"/>
                   </a:solidFill>
-                  <a:latin typeface="Karla"/>
+                  <a:latin typeface="Calibri"/>
                   <a:ea typeface="Calibri"/>
                   <a:cs typeface="Calibri"/>
                   <a:sym typeface="Calibri"/>
@@ -19641,7 +19641,7 @@
                   <a:solidFill>
                     <a:srgbClr val="C9723F"/>
                   </a:solidFill>
-                  <a:latin typeface="Karla"/>
+                  <a:latin typeface="Calibri"/>
                   <a:ea typeface="Calibri"/>
                   <a:cs typeface="Calibri"/>
                   <a:sym typeface="Calibri"/>
@@ -19704,7 +19704,7 @@
                   <a:solidFill>
                     <a:srgbClr val="41A45D"/>
                   </a:solidFill>
-                  <a:latin typeface="Karla"/>
+                  <a:latin typeface="Calibri"/>
                   <a:ea typeface="Calibri"/>
                   <a:cs typeface="Calibri"/>
                   <a:sym typeface="Calibri"/>
@@ -19793,7 +19793,7 @@
                   <a:solidFill>
                     <a:srgbClr val="41A45D"/>
                   </a:solidFill>
-                  <a:latin typeface="Karla"/>
+                  <a:latin typeface="Calibri"/>
                   <a:ea typeface="Calibri"/>
                   <a:cs typeface="Calibri"/>
                   <a:sym typeface="Calibri"/>
@@ -19882,7 +19882,7 @@
                   <a:solidFill>
                     <a:srgbClr val="41A45D"/>
                   </a:solidFill>
-                  <a:latin typeface="Karla"/>
+                  <a:latin typeface="Calibri"/>
                   <a:ea typeface="Calibri"/>
                   <a:cs typeface="Calibri"/>
                   <a:sym typeface="Calibri"/>
@@ -19971,7 +19971,7 @@
                   <a:solidFill>
                     <a:srgbClr val="41A45D"/>
                   </a:solidFill>
-                  <a:latin typeface="Karla"/>
+                  <a:latin typeface="Calibri"/>
                   <a:ea typeface="Calibri"/>
                   <a:cs typeface="Calibri"/>
                   <a:sym typeface="Calibri"/>
@@ -20198,7 +20198,7 @@
                   <a:solidFill>
                     <a:srgbClr val="C9723F"/>
                   </a:solidFill>
-                  <a:latin typeface="Karla"/>
+                  <a:latin typeface="Calibri"/>
                   <a:ea typeface="Calibri"/>
                   <a:cs typeface="Calibri"/>
                   <a:sym typeface="Calibri"/>
@@ -20261,7 +20261,7 @@
                   <a:solidFill>
                     <a:srgbClr val="41A45D"/>
                   </a:solidFill>
-                  <a:latin typeface="Karla"/>
+                  <a:latin typeface="Calibri"/>
                   <a:ea typeface="Calibri"/>
                   <a:cs typeface="Calibri"/>
                   <a:sym typeface="Calibri"/>
@@ -20350,7 +20350,7 @@
                   <a:solidFill>
                     <a:srgbClr val="41A45D"/>
                   </a:solidFill>
-                  <a:latin typeface="Karla"/>
+                  <a:latin typeface="Calibri"/>
                   <a:ea typeface="Calibri"/>
                   <a:cs typeface="Calibri"/>
                   <a:sym typeface="Calibri"/>
@@ -20439,7 +20439,7 @@
                   <a:solidFill>
                     <a:srgbClr val="41A45D"/>
                   </a:solidFill>
-                  <a:latin typeface="Karla"/>
+                  <a:latin typeface="Calibri"/>
                   <a:ea typeface="Calibri"/>
                   <a:cs typeface="Calibri"/>
                   <a:sym typeface="Calibri"/>
@@ -20528,7 +20528,7 @@
                   <a:solidFill>
                     <a:srgbClr val="41A45D"/>
                   </a:solidFill>
-                  <a:latin typeface="Karla"/>
+                  <a:latin typeface="Calibri"/>
                   <a:ea typeface="Calibri"/>
                   <a:cs typeface="Calibri"/>
                   <a:sym typeface="Calibri"/>
@@ -20755,7 +20755,7 @@
                   <a:solidFill>
                     <a:srgbClr val="C9723F"/>
                   </a:solidFill>
-                  <a:latin typeface="Karla"/>
+                  <a:latin typeface="Calibri"/>
                   <a:ea typeface="Calibri"/>
                   <a:cs typeface="Calibri"/>
                   <a:sym typeface="Calibri"/>
@@ -20818,7 +20818,7 @@
                   <a:solidFill>
                     <a:srgbClr val="41A45D"/>
                   </a:solidFill>
-                  <a:latin typeface="Karla"/>
+                  <a:latin typeface="Calibri"/>
                   <a:ea typeface="Calibri"/>
                   <a:cs typeface="Calibri"/>
                   <a:sym typeface="Calibri"/>
@@ -20907,7 +20907,7 @@
                   <a:solidFill>
                     <a:srgbClr val="41A45D"/>
                   </a:solidFill>
-                  <a:latin typeface="Karla"/>
+                  <a:latin typeface="Calibri"/>
                   <a:ea typeface="Calibri"/>
                   <a:cs typeface="Calibri"/>
                   <a:sym typeface="Calibri"/>
@@ -20996,7 +20996,7 @@
                   <a:solidFill>
                     <a:srgbClr val="41A45D"/>
                   </a:solidFill>
-                  <a:latin typeface="Karla"/>
+                  <a:latin typeface="Calibri"/>
                   <a:ea typeface="Calibri"/>
                   <a:cs typeface="Calibri"/>
                   <a:sym typeface="Calibri"/>
@@ -21085,7 +21085,7 @@
                   <a:solidFill>
                     <a:srgbClr val="41A45D"/>
                   </a:solidFill>
-                  <a:latin typeface="Karla"/>
+                  <a:latin typeface="Calibri"/>
                   <a:ea typeface="Calibri"/>
                   <a:cs typeface="Calibri"/>
                   <a:sym typeface="Calibri"/>
@@ -21312,7 +21312,7 @@
                   <a:solidFill>
                     <a:srgbClr val="C9723F"/>
                   </a:solidFill>
-                  <a:latin typeface="Karla"/>
+                  <a:latin typeface="Calibri"/>
                   <a:ea typeface="Calibri"/>
                   <a:cs typeface="Calibri"/>
                   <a:sym typeface="Calibri"/>
@@ -21375,7 +21375,7 @@
                   <a:solidFill>
                     <a:srgbClr val="41A45D"/>
                   </a:solidFill>
-                  <a:latin typeface="Karla"/>
+                  <a:latin typeface="Calibri"/>
                   <a:ea typeface="Calibri"/>
                   <a:cs typeface="Calibri"/>
                   <a:sym typeface="Calibri"/>
@@ -21464,7 +21464,7 @@
                   <a:solidFill>
                     <a:srgbClr val="41A45D"/>
                   </a:solidFill>
-                  <a:latin typeface="Karla"/>
+                  <a:latin typeface="Calibri"/>
                   <a:ea typeface="Calibri"/>
                   <a:cs typeface="Calibri"/>
                   <a:sym typeface="Calibri"/>
@@ -21553,7 +21553,7 @@
                   <a:solidFill>
                     <a:srgbClr val="41A45D"/>
                   </a:solidFill>
-                  <a:latin typeface="Karla"/>
+                  <a:latin typeface="Calibri"/>
                   <a:ea typeface="Calibri"/>
                   <a:cs typeface="Calibri"/>
                   <a:sym typeface="Calibri"/>
@@ -21642,7 +21642,7 @@
                   <a:solidFill>
                     <a:srgbClr val="41A45D"/>
                   </a:solidFill>
-                  <a:latin typeface="Karla"/>
+                  <a:latin typeface="Calibri"/>
                   <a:ea typeface="Calibri"/>
                   <a:cs typeface="Calibri"/>
                   <a:sym typeface="Calibri"/>
@@ -21716,7 +21716,7 @@
                 <a:solidFill>
                   <a:srgbClr val="8B9179"/>
                 </a:solidFill>
-                <a:latin typeface="Karla"/>
+                <a:latin typeface="Calibri"/>
               </a:rPr>
               <a:t>The Pastoral Guide</a:t>
             </a:r>
@@ -21847,7 +21847,7 @@
                 <a:solidFill>
                   <a:srgbClr val="B1C69A"/>
                 </a:solidFill>
-                <a:latin typeface="Karla"/>
+                <a:latin typeface="Calibri"/>
                 <a:ea typeface="Calibri"/>
                 <a:cs typeface="Calibri"/>
                 <a:sym typeface="Calibri"/>
@@ -21906,11 +21906,11 @@
               <a:buNone/>
             </a:pPr>
             <a:r>
-              <a:rPr b="1" i="0" lang="en-US" sz="3000" u="none" cap="none" strike="noStrike">
+              <a:rPr b="0" i="0" lang="en-US" sz="3000" u="none" cap="none" strike="noStrike">
                 <a:solidFill>
                   <a:srgbClr val="41A45D"/>
                 </a:solidFill>
-                <a:latin typeface="Libre Caslon Display"/>
+                <a:latin typeface="Georgia"/>
                 <a:ea typeface="Cambria"/>
                 <a:cs typeface="Cambria"/>
                 <a:sym typeface="Cambria"/>
@@ -22088,7 +22088,7 @@
                 <a:solidFill>
                   <a:srgbClr val="4F7B4F"/>
                 </a:solidFill>
-                <a:latin typeface="Karla"/>
+                <a:latin typeface="Calibri"/>
                 <a:ea typeface="Calibri"/>
                 <a:cs typeface="Calibri"/>
                 <a:sym typeface="Calibri"/>
@@ -22222,7 +22222,7 @@
                 <a:solidFill>
                   <a:srgbClr val="4F7B4F"/>
                 </a:solidFill>
-                <a:latin typeface="Karla"/>
+                <a:latin typeface="Calibri"/>
                 <a:ea typeface="Calibri"/>
                 <a:cs typeface="Calibri"/>
                 <a:sym typeface="Calibri"/>
@@ -22400,7 +22400,7 @@
                 <a:solidFill>
                   <a:srgbClr val="4F7B4F"/>
                 </a:solidFill>
-                <a:latin typeface="Karla"/>
+                <a:latin typeface="Calibri"/>
                 <a:ea typeface="Calibri"/>
                 <a:cs typeface="Calibri"/>
                 <a:sym typeface="Calibri"/>
@@ -22534,7 +22534,7 @@
                 <a:solidFill>
                   <a:srgbClr val="4F7B4F"/>
                 </a:solidFill>
-                <a:latin typeface="Karla"/>
+                <a:latin typeface="Calibri"/>
                 <a:ea typeface="Calibri"/>
                 <a:cs typeface="Calibri"/>
                 <a:sym typeface="Calibri"/>
@@ -22712,7 +22712,7 @@
                 <a:solidFill>
                   <a:srgbClr val="4F7B4F"/>
                 </a:solidFill>
-                <a:latin typeface="Karla"/>
+                <a:latin typeface="Calibri"/>
                 <a:ea typeface="Calibri"/>
                 <a:cs typeface="Calibri"/>
                 <a:sym typeface="Calibri"/>
@@ -22846,7 +22846,7 @@
                 <a:solidFill>
                   <a:srgbClr val="4F7B4F"/>
                 </a:solidFill>
-                <a:latin typeface="Karla"/>
+                <a:latin typeface="Calibri"/>
                 <a:ea typeface="Calibri"/>
                 <a:cs typeface="Calibri"/>
                 <a:sym typeface="Calibri"/>
@@ -22955,7 +22955,7 @@
                 <a:solidFill>
                   <a:srgbClr val="A3532A"/>
                 </a:solidFill>
-                <a:latin typeface="Karla"/>
+                <a:latin typeface="Calibri"/>
                 <a:ea typeface="Calibri"/>
                 <a:cs typeface="Calibri"/>
                 <a:sym typeface="Calibri"/>
@@ -23018,7 +23018,7 @@
                 <a:solidFill>
                   <a:srgbClr val="899B86"/>
                 </a:solidFill>
-                <a:latin typeface="Karla"/>
+                <a:latin typeface="Calibri"/>
                 <a:ea typeface="Calibri"/>
                 <a:cs typeface="Calibri"/>
                 <a:sym typeface="Calibri"/>
@@ -23065,7 +23065,7 @@
                 <a:solidFill>
                   <a:srgbClr val="8B9179"/>
                 </a:solidFill>
-                <a:latin typeface="Karla"/>
+                <a:latin typeface="Calibri"/>
               </a:rPr>
               <a:t>The Pastoral Guide</a:t>
             </a:r>
@@ -23196,7 +23196,7 @@
                 <a:solidFill>
                   <a:srgbClr val="B1C69A"/>
                 </a:solidFill>
-                <a:latin typeface="Karla"/>
+                <a:latin typeface="Calibri"/>
                 <a:ea typeface="Calibri"/>
                 <a:cs typeface="Calibri"/>
                 <a:sym typeface="Calibri"/>
@@ -23255,11 +23255,11 @@
               <a:buNone/>
             </a:pPr>
             <a:r>
-              <a:rPr b="1" i="0" lang="en-US" sz="3000" u="none" cap="none" strike="noStrike">
+              <a:rPr b="0" i="0" lang="en-US" sz="3000" u="none" cap="none" strike="noStrike">
                 <a:solidFill>
                   <a:srgbClr val="41A45D"/>
                 </a:solidFill>
-                <a:latin typeface="Libre Caslon Display"/>
+                <a:latin typeface="Georgia"/>
                 <a:ea typeface="Cambria"/>
                 <a:cs typeface="Cambria"/>
                 <a:sym typeface="Cambria"/>
@@ -23322,7 +23322,7 @@
                 <a:solidFill>
                   <a:srgbClr val="899B86"/>
                 </a:solidFill>
-                <a:latin typeface="Karla"/>
+                <a:latin typeface="Calibri"/>
                 <a:ea typeface="Calibri"/>
                 <a:cs typeface="Calibri"/>
                 <a:sym typeface="Calibri"/>
@@ -23500,7 +23500,7 @@
                 <a:solidFill>
                   <a:srgbClr val="4F7B4F"/>
                 </a:solidFill>
-                <a:latin typeface="Karla"/>
+                <a:latin typeface="Calibri"/>
                 <a:ea typeface="Calibri"/>
                 <a:cs typeface="Calibri"/>
                 <a:sym typeface="Calibri"/>
@@ -23634,7 +23634,7 @@
                 <a:solidFill>
                   <a:srgbClr val="4F7B4F"/>
                 </a:solidFill>
-                <a:latin typeface="Karla"/>
+                <a:latin typeface="Calibri"/>
                 <a:ea typeface="Calibri"/>
                 <a:cs typeface="Calibri"/>
                 <a:sym typeface="Calibri"/>
@@ -23812,7 +23812,7 @@
                 <a:solidFill>
                   <a:srgbClr val="4F7B4F"/>
                 </a:solidFill>
-                <a:latin typeface="Karla"/>
+                <a:latin typeface="Calibri"/>
                 <a:ea typeface="Calibri"/>
                 <a:cs typeface="Calibri"/>
                 <a:sym typeface="Calibri"/>
@@ -23946,7 +23946,7 @@
                 <a:solidFill>
                   <a:srgbClr val="4F7B4F"/>
                 </a:solidFill>
-                <a:latin typeface="Karla"/>
+                <a:latin typeface="Calibri"/>
                 <a:ea typeface="Calibri"/>
                 <a:cs typeface="Calibri"/>
                 <a:sym typeface="Calibri"/>
@@ -24124,7 +24124,7 @@
                 <a:solidFill>
                   <a:srgbClr val="4F7B4F"/>
                 </a:solidFill>
-                <a:latin typeface="Karla"/>
+                <a:latin typeface="Calibri"/>
                 <a:ea typeface="Calibri"/>
                 <a:cs typeface="Calibri"/>
                 <a:sym typeface="Calibri"/>
@@ -24187,7 +24187,7 @@
                 <a:solidFill>
                   <a:srgbClr val="899B86"/>
                 </a:solidFill>
-                <a:latin typeface="Karla"/>
+                <a:latin typeface="Calibri"/>
                 <a:ea typeface="Calibri"/>
                 <a:cs typeface="Calibri"/>
                 <a:sym typeface="Calibri"/>
@@ -24234,7 +24234,7 @@
                 <a:solidFill>
                   <a:srgbClr val="8B9179"/>
                 </a:solidFill>
-                <a:latin typeface="Karla"/>
+                <a:latin typeface="Calibri"/>
               </a:rPr>
               <a:t>The Pastoral Guide</a:t>
             </a:r>
@@ -24365,7 +24365,7 @@
                 <a:solidFill>
                   <a:srgbClr val="B1C69A"/>
                 </a:solidFill>
-                <a:latin typeface="Karla"/>
+                <a:latin typeface="Calibri"/>
                 <a:ea typeface="Calibri"/>
                 <a:cs typeface="Calibri"/>
                 <a:sym typeface="Calibri"/>
@@ -24424,11 +24424,11 @@
               <a:buNone/>
             </a:pPr>
             <a:r>
-              <a:rPr b="1" i="0" lang="en-US" sz="3000" u="none" cap="none" strike="noStrike">
+              <a:rPr b="0" i="0" lang="en-US" sz="3000" u="none" cap="none" strike="noStrike">
                 <a:solidFill>
                   <a:srgbClr val="41A45D"/>
                 </a:solidFill>
-                <a:latin typeface="Libre Caslon Display"/>
+                <a:latin typeface="Georgia"/>
                 <a:ea typeface="Cambria"/>
                 <a:cs typeface="Cambria"/>
                 <a:sym typeface="Cambria"/>
@@ -24577,11 +24577,11 @@
               <a:buNone/>
             </a:pPr>
             <a:r>
-              <a:rPr b="1" i="0" lang="en-US" sz="1800" u="none" cap="none" strike="noStrike">
+              <a:rPr b="0" i="0" lang="en-US" sz="1800" u="none" cap="none" strike="noStrike">
                 <a:solidFill>
                   <a:srgbClr val="FFFFFF"/>
                 </a:solidFill>
-                <a:latin typeface="Libre Caslon Display"/>
+                <a:latin typeface="Georgia"/>
                 <a:ea typeface="Cambria"/>
                 <a:cs typeface="Cambria"/>
                 <a:sym typeface="Cambria"/>
@@ -24644,7 +24644,7 @@
                 <a:solidFill>
                   <a:srgbClr val="4F7B4F"/>
                 </a:solidFill>
-                <a:latin typeface="Karla"/>
+                <a:latin typeface="Calibri"/>
                 <a:ea typeface="Calibri"/>
                 <a:cs typeface="Calibri"/>
                 <a:sym typeface="Calibri"/>
@@ -24793,11 +24793,11 @@
               <a:buNone/>
             </a:pPr>
             <a:r>
-              <a:rPr b="1" i="0" lang="en-US" sz="1800" u="none" cap="none" strike="noStrike">
+              <a:rPr b="0" i="0" lang="en-US" sz="1800" u="none" cap="none" strike="noStrike">
                 <a:solidFill>
                   <a:srgbClr val="FFFFFF"/>
                 </a:solidFill>
-                <a:latin typeface="Libre Caslon Display"/>
+                <a:latin typeface="Georgia"/>
                 <a:ea typeface="Cambria"/>
                 <a:cs typeface="Cambria"/>
                 <a:sym typeface="Cambria"/>
@@ -24860,7 +24860,7 @@
                 <a:solidFill>
                   <a:srgbClr val="4F7B4F"/>
                 </a:solidFill>
-                <a:latin typeface="Karla"/>
+                <a:latin typeface="Calibri"/>
                 <a:ea typeface="Calibri"/>
                 <a:cs typeface="Calibri"/>
                 <a:sym typeface="Calibri"/>
@@ -25009,11 +25009,11 @@
               <a:buNone/>
             </a:pPr>
             <a:r>
-              <a:rPr b="1" i="0" lang="en-US" sz="1800" u="none" cap="none" strike="noStrike">
+              <a:rPr b="0" i="0" lang="en-US" sz="1800" u="none" cap="none" strike="noStrike">
                 <a:solidFill>
                   <a:srgbClr val="FFFFFF"/>
                 </a:solidFill>
-                <a:latin typeface="Libre Caslon Display"/>
+                <a:latin typeface="Georgia"/>
                 <a:ea typeface="Cambria"/>
                 <a:cs typeface="Cambria"/>
                 <a:sym typeface="Cambria"/>
@@ -25076,7 +25076,7 @@
                 <a:solidFill>
                   <a:srgbClr val="4F7B4F"/>
                 </a:solidFill>
-                <a:latin typeface="Karla"/>
+                <a:latin typeface="Calibri"/>
                 <a:ea typeface="Calibri"/>
                 <a:cs typeface="Calibri"/>
                 <a:sym typeface="Calibri"/>
@@ -25225,11 +25225,11 @@
               <a:buNone/>
             </a:pPr>
             <a:r>
-              <a:rPr b="1" i="0" lang="en-US" sz="1800" u="none" cap="none" strike="noStrike">
+              <a:rPr b="0" i="0" lang="en-US" sz="1800" u="none" cap="none" strike="noStrike">
                 <a:solidFill>
                   <a:srgbClr val="FFFFFF"/>
                 </a:solidFill>
-                <a:latin typeface="Libre Caslon Display"/>
+                <a:latin typeface="Georgia"/>
                 <a:ea typeface="Cambria"/>
                 <a:cs typeface="Cambria"/>
                 <a:sym typeface="Cambria"/>
@@ -25292,7 +25292,7 @@
                 <a:solidFill>
                   <a:srgbClr val="4F7B4F"/>
                 </a:solidFill>
-                <a:latin typeface="Karla"/>
+                <a:latin typeface="Calibri"/>
                 <a:ea typeface="Calibri"/>
                 <a:cs typeface="Calibri"/>
                 <a:sym typeface="Calibri"/>
@@ -25441,11 +25441,11 @@
               <a:buNone/>
             </a:pPr>
             <a:r>
-              <a:rPr b="1" i="0" lang="en-US" sz="1800" u="none" cap="none" strike="noStrike">
+              <a:rPr b="0" i="0" lang="en-US" sz="1800" u="none" cap="none" strike="noStrike">
                 <a:solidFill>
                   <a:srgbClr val="FFFFFF"/>
                 </a:solidFill>
-                <a:latin typeface="Libre Caslon Display"/>
+                <a:latin typeface="Georgia"/>
                 <a:ea typeface="Cambria"/>
                 <a:cs typeface="Cambria"/>
                 <a:sym typeface="Cambria"/>
@@ -25508,7 +25508,7 @@
                 <a:solidFill>
                   <a:srgbClr val="4F7B4F"/>
                 </a:solidFill>
-                <a:latin typeface="Karla"/>
+                <a:latin typeface="Calibri"/>
                 <a:ea typeface="Calibri"/>
                 <a:cs typeface="Calibri"/>
                 <a:sym typeface="Calibri"/>
@@ -25657,11 +25657,11 @@
               <a:buNone/>
             </a:pPr>
             <a:r>
-              <a:rPr b="1" i="0" lang="en-US" sz="1800" u="none" cap="none" strike="noStrike">
+              <a:rPr b="0" i="0" lang="en-US" sz="1800" u="none" cap="none" strike="noStrike">
                 <a:solidFill>
                   <a:srgbClr val="FFFFFF"/>
                 </a:solidFill>
-                <a:latin typeface="Libre Caslon Display"/>
+                <a:latin typeface="Georgia"/>
                 <a:ea typeface="Cambria"/>
                 <a:cs typeface="Cambria"/>
                 <a:sym typeface="Cambria"/>
@@ -25724,7 +25724,7 @@
                 <a:solidFill>
                   <a:srgbClr val="4F7B4F"/>
                 </a:solidFill>
-                <a:latin typeface="Karla"/>
+                <a:latin typeface="Calibri"/>
                 <a:ea typeface="Calibri"/>
                 <a:cs typeface="Calibri"/>
                 <a:sym typeface="Calibri"/>
@@ -25873,11 +25873,11 @@
               <a:buNone/>
             </a:pPr>
             <a:r>
-              <a:rPr b="1" i="0" lang="en-US" sz="1800" u="none" cap="none" strike="noStrike">
+              <a:rPr b="0" i="0" lang="en-US" sz="1800" u="none" cap="none" strike="noStrike">
                 <a:solidFill>
                   <a:srgbClr val="FFFFFF"/>
                 </a:solidFill>
-                <a:latin typeface="Libre Caslon Display"/>
+                <a:latin typeface="Georgia"/>
                 <a:ea typeface="Cambria"/>
                 <a:cs typeface="Cambria"/>
                 <a:sym typeface="Cambria"/>
@@ -25940,7 +25940,7 @@
                 <a:solidFill>
                   <a:srgbClr val="4F7B4F"/>
                 </a:solidFill>
-                <a:latin typeface="Karla"/>
+                <a:latin typeface="Calibri"/>
                 <a:ea typeface="Calibri"/>
                 <a:cs typeface="Calibri"/>
                 <a:sym typeface="Calibri"/>
@@ -26003,7 +26003,7 @@
                 <a:solidFill>
                   <a:srgbClr val="899B86"/>
                 </a:solidFill>
-                <a:latin typeface="Karla"/>
+                <a:latin typeface="Calibri"/>
                 <a:ea typeface="Calibri"/>
                 <a:cs typeface="Calibri"/>
                 <a:sym typeface="Calibri"/>
@@ -26066,7 +26066,7 @@
                 <a:solidFill>
                   <a:srgbClr val="899B86"/>
                 </a:solidFill>
-                <a:latin typeface="Karla"/>
+                <a:latin typeface="Calibri"/>
                 <a:ea typeface="Calibri"/>
                 <a:cs typeface="Calibri"/>
                 <a:sym typeface="Calibri"/>
@@ -26113,7 +26113,7 @@
                 <a:solidFill>
                   <a:srgbClr val="8B9179"/>
                 </a:solidFill>
-                <a:latin typeface="Karla"/>
+                <a:latin typeface="Calibri"/>
               </a:rPr>
               <a:t>The Pastoral Guide</a:t>
             </a:r>

--- a/pastoral-projects/the-planting-project/downloads/The_Planting_Project.pptx
+++ b/pastoral-projects/the-planting-project/downloads/The_Planting_Project.pptx
@@ -4381,55 +4381,7 @@
                 <a:cs typeface="Calibri"/>
                 <a:sym typeface="Calibri"/>
               </a:rPr>
-              <a:t>Ten pairs. Ten herbs. A few weeks of growing and caring</a:t>
-            </a:r>
-            <a:r>
-              <a:rPr lang="en-US" sz="1600">
-                <a:solidFill>
-                  <a:srgbClr val="5C6552"/>
-                </a:solidFill>
-                <a:latin typeface="Calibri"/>
-                <a:ea typeface="Calibri"/>
-                <a:cs typeface="Calibri"/>
-                <a:sym typeface="Calibri"/>
-              </a:rPr>
-              <a:t>,</a:t>
-            </a:r>
-            <a:r>
-              <a:rPr b="0" i="0" lang="en-US" sz="1600" u="none" cap="none" strike="noStrike">
-                <a:solidFill>
-                  <a:srgbClr val="5C6552"/>
-                </a:solidFill>
-                <a:latin typeface="Calibri"/>
-                <a:ea typeface="Calibri"/>
-                <a:cs typeface="Calibri"/>
-                <a:sym typeface="Calibri"/>
-              </a:rPr>
-              <a:t> then a meal </a:t>
-            </a:r>
-            <a:r>
-              <a:rPr lang="en-US" sz="1600">
-                <a:solidFill>
-                  <a:srgbClr val="5C6552"/>
-                </a:solidFill>
-                <a:latin typeface="Calibri"/>
-                <a:ea typeface="Calibri"/>
-                <a:cs typeface="Calibri"/>
-                <a:sym typeface="Calibri"/>
-              </a:rPr>
-              <a:t>you cook for your </a:t>
-            </a:r>
-            <a:r>
-              <a:rPr lang="en-US" sz="1600">
-                <a:solidFill>
-                  <a:srgbClr val="5C6552"/>
-                </a:solidFill>
-                <a:latin typeface="Calibri"/>
-                <a:ea typeface="Calibri"/>
-                <a:cs typeface="Calibri"/>
-                <a:sym typeface="Calibri"/>
-              </a:rPr>
-              <a:t>families.</a:t>
+              <a:t>Ten pairs and ten herbs: a few weeks of growing and caring, then a meal you cook for your families.</a:t>
             </a:r>
             <a:endParaRPr b="0" i="0" sz="1600" u="none" cap="none" strike="noStrike">
               <a:solidFill>
@@ -8059,7 +8011,7 @@
                 <a:cs typeface="Calibri"/>
                 <a:sym typeface="Calibri"/>
               </a:rPr>
-              <a:t>Take a photo each week and build a gallery of your herb’s journey from seed to harvest!</a:t>
+              <a:t>Take a photo each week and build a gallery of your herb from seed to harvest!</a:t>
             </a:r>
             <a:endParaRPr b="0" i="0" sz="1300" u="none" cap="none" strike="noStrike">
               <a:solidFill>
@@ -12012,7 +11964,7 @@
                 <a:cs typeface="Calibri"/>
                 <a:sym typeface="Calibri"/>
               </a:rPr>
-              <a:t>Each pair will follow the same journey with their own herb:</a:t>
+              <a:t>Each pair will follow the same steps with their own herb:</a:t>
             </a:r>
             <a:endParaRPr b="0" i="0" sz="1300" u="none" cap="none" strike="noStrike">
               <a:solidFill>
